--- a/企画書/就職作品企画書.pptx
+++ b/企画書/就職作品企画書.pptx
@@ -3630,8 +3630,8 @@
         </p:nvSpPr>
         <p:spPr>
           <a:xfrm>
-            <a:off x="842962" y="314326"/>
-            <a:ext cx="3386137" cy="369332"/>
+            <a:off x="842962" y="314325"/>
+            <a:ext cx="10301288" cy="707886"/>
           </a:xfrm>
           <a:prstGeom prst="rect">
             <a:avLst/>
@@ -3645,30 +3645,144 @@
           <a:lstStyle/>
           <a:p>
             <a:r>
-              <a:rPr lang="ja-JP" altLang="en-US" dirty="0"/>
+              <a:rPr lang="ja-JP" altLang="en-US" sz="4000" dirty="0"/>
               <a:t>タイトル </a:t>
             </a:r>
             <a:r>
-              <a:rPr lang="en-US" altLang="ja-JP" dirty="0"/>
+              <a:rPr lang="en-US" altLang="ja-JP" sz="4000" dirty="0"/>
               <a:t>: Ninja</a:t>
             </a:r>
             <a:r>
-              <a:rPr lang="ja-JP" altLang="en-US" dirty="0"/>
-              <a:t> ○○</a:t>
-            </a:r>
-            <a:r>
-              <a:rPr lang="en-US" altLang="ja-JP" dirty="0"/>
-              <a:t>(</a:t>
-            </a:r>
-            <a:r>
-              <a:rPr lang="ja-JP" altLang="en-US" dirty="0"/>
+              <a:rPr lang="ja-JP" altLang="en-US" sz="4000" dirty="0"/>
+              <a:t> </a:t>
+            </a:r>
+            <a:r>
+              <a:rPr lang="en-US" altLang="ja-JP" sz="4000" dirty="0"/>
+              <a:t>Run(</a:t>
+            </a:r>
+            <a:r>
+              <a:rPr lang="ja-JP" altLang="en-US" sz="4000" dirty="0"/>
               <a:t>考え中</a:t>
             </a:r>
             <a:r>
-              <a:rPr lang="en-US" altLang="ja-JP" dirty="0"/>
+              <a:rPr lang="en-US" altLang="ja-JP" sz="4000" dirty="0"/>
               <a:t>)</a:t>
             </a:r>
-            <a:endParaRPr kumimoji="1" lang="ja-JP" altLang="en-US" dirty="0"/>
+            <a:endParaRPr kumimoji="1" lang="ja-JP" altLang="en-US" sz="4000" dirty="0"/>
+          </a:p>
+        </p:txBody>
+      </p:sp>
+      <p:pic>
+        <p:nvPicPr>
+          <p:cNvPr id="3" name="図 2">
+            <a:extLst>
+              <a:ext uri="{FF2B5EF4-FFF2-40B4-BE49-F238E27FC236}">
+                <a16:creationId xmlns:a16="http://schemas.microsoft.com/office/drawing/2014/main" id="{4F9D12E9-B4FA-48C3-84F8-0ADB7F21EAA6}"/>
+              </a:ext>
+            </a:extLst>
+          </p:cNvPr>
+          <p:cNvPicPr>
+            <a:picLocks noChangeAspect="1"/>
+          </p:cNvPicPr>
+          <p:nvPr/>
+        </p:nvPicPr>
+        <p:blipFill>
+          <a:blip r:embed="rId2">
+            <a:extLst>
+              <a:ext uri="{28A0092B-C50C-407E-A947-70E740481C1C}">
+                <a14:useLocalDpi xmlns:a14="http://schemas.microsoft.com/office/drawing/2010/main" val="0"/>
+              </a:ext>
+            </a:extLst>
+          </a:blip>
+          <a:stretch>
+            <a:fillRect/>
+          </a:stretch>
+        </p:blipFill>
+        <p:spPr>
+          <a:xfrm>
+            <a:off x="428624" y="1785718"/>
+            <a:ext cx="5004256" cy="4500781"/>
+          </a:xfrm>
+          <a:prstGeom prst="rect">
+            <a:avLst/>
+          </a:prstGeom>
+        </p:spPr>
+      </p:pic>
+      <p:sp>
+        <p:nvSpPr>
+          <p:cNvPr id="5" name="テキスト ボックス 4">
+            <a:extLst>
+              <a:ext uri="{FF2B5EF4-FFF2-40B4-BE49-F238E27FC236}">
+                <a16:creationId xmlns:a16="http://schemas.microsoft.com/office/drawing/2014/main" id="{F0BE9138-F8EB-4304-A918-17FF0FF73298}"/>
+              </a:ext>
+            </a:extLst>
+          </p:cNvPr>
+          <p:cNvSpPr txBox="1"/>
+          <p:nvPr/>
+        </p:nvSpPr>
+        <p:spPr>
+          <a:xfrm>
+            <a:off x="6096000" y="3186112"/>
+            <a:ext cx="5014912" cy="523220"/>
+          </a:xfrm>
+          <a:prstGeom prst="rect">
+            <a:avLst/>
+          </a:prstGeom>
+          <a:noFill/>
+        </p:spPr>
+        <p:txBody>
+          <a:bodyPr wrap="square" rtlCol="0">
+            <a:spAutoFit/>
+          </a:bodyPr>
+          <a:lstStyle/>
+          <a:p>
+            <a:r>
+              <a:rPr kumimoji="1" lang="ja-JP" altLang="en-US" sz="2800" dirty="0"/>
+              <a:t>・横スクロール</a:t>
+            </a:r>
+            <a:r>
+              <a:rPr kumimoji="1" lang="en-US" altLang="ja-JP" sz="2800" dirty="0"/>
+              <a:t>2D</a:t>
+            </a:r>
+            <a:r>
+              <a:rPr kumimoji="1" lang="ja-JP" altLang="en-US" sz="2800" dirty="0"/>
+              <a:t>アクション</a:t>
+            </a:r>
+          </a:p>
+        </p:txBody>
+      </p:sp>
+      <p:sp>
+        <p:nvSpPr>
+          <p:cNvPr id="6" name="テキスト ボックス 5">
+            <a:extLst>
+              <a:ext uri="{FF2B5EF4-FFF2-40B4-BE49-F238E27FC236}">
+                <a16:creationId xmlns:a16="http://schemas.microsoft.com/office/drawing/2014/main" id="{B6895FE1-F011-4533-961B-2A3653BC25A2}"/>
+              </a:ext>
+            </a:extLst>
+          </p:cNvPr>
+          <p:cNvSpPr txBox="1"/>
+          <p:nvPr/>
+        </p:nvSpPr>
+        <p:spPr>
+          <a:xfrm>
+            <a:off x="6096000" y="4002639"/>
+            <a:ext cx="5570756" cy="523220"/>
+          </a:xfrm>
+          <a:prstGeom prst="rect">
+            <a:avLst/>
+          </a:prstGeom>
+          <a:noFill/>
+        </p:spPr>
+        <p:txBody>
+          <a:bodyPr wrap="none" rtlCol="0">
+            <a:spAutoFit/>
+          </a:bodyPr>
+          <a:lstStyle/>
+          <a:p>
+            <a:r>
+              <a:rPr kumimoji="1" lang="ja-JP" altLang="en-US" sz="2800" dirty="0"/>
+              <a:t>・ハイテンポで爽快にクリア！！</a:t>
+            </a:r>
           </a:p>
         </p:txBody>
       </p:sp>

--- a/企画書/就職作品企画書.pptx
+++ b/企画書/就職作品企画書.pptx
@@ -261,7 +261,7 @@
           <a:p>
             <a:fld id="{A7B5DEA0-79CC-47BA-924D-403B07C28CBF}" type="datetimeFigureOut">
               <a:rPr kumimoji="1" lang="ja-JP" altLang="en-US" smtClean="0"/>
-              <a:t>2026/5/28</a:t>
+              <a:t>2026/6/2</a:t>
             </a:fld>
             <a:endParaRPr kumimoji="1" lang="ja-JP" altLang="en-US"/>
           </a:p>
@@ -491,7 +491,7 @@
           <a:p>
             <a:fld id="{A7B5DEA0-79CC-47BA-924D-403B07C28CBF}" type="datetimeFigureOut">
               <a:rPr kumimoji="1" lang="ja-JP" altLang="en-US" smtClean="0"/>
-              <a:t>2026/5/28</a:t>
+              <a:t>2026/6/2</a:t>
             </a:fld>
             <a:endParaRPr kumimoji="1" lang="ja-JP" altLang="en-US"/>
           </a:p>
@@ -731,7 +731,7 @@
           <a:p>
             <a:fld id="{A7B5DEA0-79CC-47BA-924D-403B07C28CBF}" type="datetimeFigureOut">
               <a:rPr kumimoji="1" lang="ja-JP" altLang="en-US" smtClean="0"/>
-              <a:t>2026/5/28</a:t>
+              <a:t>2026/6/2</a:t>
             </a:fld>
             <a:endParaRPr kumimoji="1" lang="ja-JP" altLang="en-US"/>
           </a:p>
@@ -961,7 +961,7 @@
           <a:p>
             <a:fld id="{A7B5DEA0-79CC-47BA-924D-403B07C28CBF}" type="datetimeFigureOut">
               <a:rPr kumimoji="1" lang="ja-JP" altLang="en-US" smtClean="0"/>
-              <a:t>2026/5/28</a:t>
+              <a:t>2026/6/2</a:t>
             </a:fld>
             <a:endParaRPr kumimoji="1" lang="ja-JP" altLang="en-US"/>
           </a:p>
@@ -1236,7 +1236,7 @@
           <a:p>
             <a:fld id="{A7B5DEA0-79CC-47BA-924D-403B07C28CBF}" type="datetimeFigureOut">
               <a:rPr kumimoji="1" lang="ja-JP" altLang="en-US" smtClean="0"/>
-              <a:t>2026/5/28</a:t>
+              <a:t>2026/6/2</a:t>
             </a:fld>
             <a:endParaRPr kumimoji="1" lang="ja-JP" altLang="en-US"/>
           </a:p>
@@ -1565,7 +1565,7 @@
           <a:p>
             <a:fld id="{A7B5DEA0-79CC-47BA-924D-403B07C28CBF}" type="datetimeFigureOut">
               <a:rPr kumimoji="1" lang="ja-JP" altLang="en-US" smtClean="0"/>
-              <a:t>2026/5/28</a:t>
+              <a:t>2026/6/2</a:t>
             </a:fld>
             <a:endParaRPr kumimoji="1" lang="ja-JP" altLang="en-US"/>
           </a:p>
@@ -2041,7 +2041,7 @@
           <a:p>
             <a:fld id="{A7B5DEA0-79CC-47BA-924D-403B07C28CBF}" type="datetimeFigureOut">
               <a:rPr kumimoji="1" lang="ja-JP" altLang="en-US" smtClean="0"/>
-              <a:t>2026/5/28</a:t>
+              <a:t>2026/6/2</a:t>
             </a:fld>
             <a:endParaRPr kumimoji="1" lang="ja-JP" altLang="en-US"/>
           </a:p>
@@ -2182,7 +2182,7 @@
           <a:p>
             <a:fld id="{A7B5DEA0-79CC-47BA-924D-403B07C28CBF}" type="datetimeFigureOut">
               <a:rPr kumimoji="1" lang="ja-JP" altLang="en-US" smtClean="0"/>
-              <a:t>2026/5/28</a:t>
+              <a:t>2026/6/2</a:t>
             </a:fld>
             <a:endParaRPr kumimoji="1" lang="ja-JP" altLang="en-US"/>
           </a:p>
@@ -2295,7 +2295,7 @@
           <a:p>
             <a:fld id="{A7B5DEA0-79CC-47BA-924D-403B07C28CBF}" type="datetimeFigureOut">
               <a:rPr kumimoji="1" lang="ja-JP" altLang="en-US" smtClean="0"/>
-              <a:t>2026/5/28</a:t>
+              <a:t>2026/6/2</a:t>
             </a:fld>
             <a:endParaRPr kumimoji="1" lang="ja-JP" altLang="en-US"/>
           </a:p>
@@ -2638,7 +2638,7 @@
           <a:p>
             <a:fld id="{A7B5DEA0-79CC-47BA-924D-403B07C28CBF}" type="datetimeFigureOut">
               <a:rPr kumimoji="1" lang="ja-JP" altLang="en-US" smtClean="0"/>
-              <a:t>2026/5/28</a:t>
+              <a:t>2026/6/2</a:t>
             </a:fld>
             <a:endParaRPr kumimoji="1" lang="ja-JP" altLang="en-US"/>
           </a:p>
@@ -2926,7 +2926,7 @@
           <a:p>
             <a:fld id="{A7B5DEA0-79CC-47BA-924D-403B07C28CBF}" type="datetimeFigureOut">
               <a:rPr kumimoji="1" lang="ja-JP" altLang="en-US" smtClean="0"/>
-              <a:t>2026/5/28</a:t>
+              <a:t>2026/6/2</a:t>
             </a:fld>
             <a:endParaRPr kumimoji="1" lang="ja-JP" altLang="en-US"/>
           </a:p>
@@ -3199,7 +3199,7 @@
           <a:p>
             <a:fld id="{A7B5DEA0-79CC-47BA-924D-403B07C28CBF}" type="datetimeFigureOut">
               <a:rPr kumimoji="1" lang="ja-JP" altLang="en-US" smtClean="0"/>
-              <a:t>2026/5/28</a:t>
+              <a:t>2026/6/2</a:t>
             </a:fld>
             <a:endParaRPr kumimoji="1" lang="ja-JP" altLang="en-US"/>
           </a:p>
@@ -3722,8 +3722,8 @@
         </p:nvSpPr>
         <p:spPr>
           <a:xfrm>
-            <a:off x="6096000" y="3186112"/>
-            <a:ext cx="5014912" cy="523220"/>
+            <a:off x="6096000" y="3296314"/>
+            <a:ext cx="5791201" cy="523220"/>
           </a:xfrm>
           <a:prstGeom prst="rect">
             <a:avLst/>
@@ -3742,7 +3742,7 @@
             </a:r>
             <a:r>
               <a:rPr kumimoji="1" lang="en-US" altLang="ja-JP" sz="2800" dirty="0"/>
-              <a:t>2D</a:t>
+              <a:t>HD2D</a:t>
             </a:r>
             <a:r>
               <a:rPr kumimoji="1" lang="ja-JP" altLang="en-US" sz="2800" dirty="0"/>

--- a/企画書/就職作品企画書.pptx
+++ b/企画書/就職作品企画書.pptx
@@ -7,7 +7,6 @@
   <p:sldIdLst>
     <p:sldId id="256" r:id="rId2"/>
     <p:sldId id="257" r:id="rId3"/>
-    <p:sldId id="258" r:id="rId4"/>
   </p:sldIdLst>
   <p:sldSz cx="12192000" cy="6858000"/>
   <p:notesSz cx="6858000" cy="9144000"/>
@@ -261,7 +260,7 @@
           <a:p>
             <a:fld id="{A7B5DEA0-79CC-47BA-924D-403B07C28CBF}" type="datetimeFigureOut">
               <a:rPr kumimoji="1" lang="ja-JP" altLang="en-US" smtClean="0"/>
-              <a:t>2026/6/2</a:t>
+              <a:t>2026/6/4</a:t>
             </a:fld>
             <a:endParaRPr kumimoji="1" lang="ja-JP" altLang="en-US"/>
           </a:p>
@@ -491,7 +490,7 @@
           <a:p>
             <a:fld id="{A7B5DEA0-79CC-47BA-924D-403B07C28CBF}" type="datetimeFigureOut">
               <a:rPr kumimoji="1" lang="ja-JP" altLang="en-US" smtClean="0"/>
-              <a:t>2026/6/2</a:t>
+              <a:t>2026/6/4</a:t>
             </a:fld>
             <a:endParaRPr kumimoji="1" lang="ja-JP" altLang="en-US"/>
           </a:p>
@@ -731,7 +730,7 @@
           <a:p>
             <a:fld id="{A7B5DEA0-79CC-47BA-924D-403B07C28CBF}" type="datetimeFigureOut">
               <a:rPr kumimoji="1" lang="ja-JP" altLang="en-US" smtClean="0"/>
-              <a:t>2026/6/2</a:t>
+              <a:t>2026/6/4</a:t>
             </a:fld>
             <a:endParaRPr kumimoji="1" lang="ja-JP" altLang="en-US"/>
           </a:p>
@@ -961,7 +960,7 @@
           <a:p>
             <a:fld id="{A7B5DEA0-79CC-47BA-924D-403B07C28CBF}" type="datetimeFigureOut">
               <a:rPr kumimoji="1" lang="ja-JP" altLang="en-US" smtClean="0"/>
-              <a:t>2026/6/2</a:t>
+              <a:t>2026/6/4</a:t>
             </a:fld>
             <a:endParaRPr kumimoji="1" lang="ja-JP" altLang="en-US"/>
           </a:p>
@@ -1236,7 +1235,7 @@
           <a:p>
             <a:fld id="{A7B5DEA0-79CC-47BA-924D-403B07C28CBF}" type="datetimeFigureOut">
               <a:rPr kumimoji="1" lang="ja-JP" altLang="en-US" smtClean="0"/>
-              <a:t>2026/6/2</a:t>
+              <a:t>2026/6/4</a:t>
             </a:fld>
             <a:endParaRPr kumimoji="1" lang="ja-JP" altLang="en-US"/>
           </a:p>
@@ -1565,7 +1564,7 @@
           <a:p>
             <a:fld id="{A7B5DEA0-79CC-47BA-924D-403B07C28CBF}" type="datetimeFigureOut">
               <a:rPr kumimoji="1" lang="ja-JP" altLang="en-US" smtClean="0"/>
-              <a:t>2026/6/2</a:t>
+              <a:t>2026/6/4</a:t>
             </a:fld>
             <a:endParaRPr kumimoji="1" lang="ja-JP" altLang="en-US"/>
           </a:p>
@@ -2041,7 +2040,7 @@
           <a:p>
             <a:fld id="{A7B5DEA0-79CC-47BA-924D-403B07C28CBF}" type="datetimeFigureOut">
               <a:rPr kumimoji="1" lang="ja-JP" altLang="en-US" smtClean="0"/>
-              <a:t>2026/6/2</a:t>
+              <a:t>2026/6/4</a:t>
             </a:fld>
             <a:endParaRPr kumimoji="1" lang="ja-JP" altLang="en-US"/>
           </a:p>
@@ -2182,7 +2181,7 @@
           <a:p>
             <a:fld id="{A7B5DEA0-79CC-47BA-924D-403B07C28CBF}" type="datetimeFigureOut">
               <a:rPr kumimoji="1" lang="ja-JP" altLang="en-US" smtClean="0"/>
-              <a:t>2026/6/2</a:t>
+              <a:t>2026/6/4</a:t>
             </a:fld>
             <a:endParaRPr kumimoji="1" lang="ja-JP" altLang="en-US"/>
           </a:p>
@@ -2295,7 +2294,7 @@
           <a:p>
             <a:fld id="{A7B5DEA0-79CC-47BA-924D-403B07C28CBF}" type="datetimeFigureOut">
               <a:rPr kumimoji="1" lang="ja-JP" altLang="en-US" smtClean="0"/>
-              <a:t>2026/6/2</a:t>
+              <a:t>2026/6/4</a:t>
             </a:fld>
             <a:endParaRPr kumimoji="1" lang="ja-JP" altLang="en-US"/>
           </a:p>
@@ -2638,7 +2637,7 @@
           <a:p>
             <a:fld id="{A7B5DEA0-79CC-47BA-924D-403B07C28CBF}" type="datetimeFigureOut">
               <a:rPr kumimoji="1" lang="ja-JP" altLang="en-US" smtClean="0"/>
-              <a:t>2026/6/2</a:t>
+              <a:t>2026/6/4</a:t>
             </a:fld>
             <a:endParaRPr kumimoji="1" lang="ja-JP" altLang="en-US"/>
           </a:p>
@@ -2926,7 +2925,7 @@
           <a:p>
             <a:fld id="{A7B5DEA0-79CC-47BA-924D-403B07C28CBF}" type="datetimeFigureOut">
               <a:rPr kumimoji="1" lang="ja-JP" altLang="en-US" smtClean="0"/>
-              <a:t>2026/6/2</a:t>
+              <a:t>2026/6/4</a:t>
             </a:fld>
             <a:endParaRPr kumimoji="1" lang="ja-JP" altLang="en-US"/>
           </a:p>
@@ -3199,7 +3198,7 @@
           <a:p>
             <a:fld id="{A7B5DEA0-79CC-47BA-924D-403B07C28CBF}" type="datetimeFigureOut">
               <a:rPr kumimoji="1" lang="ja-JP" altLang="en-US" smtClean="0"/>
-              <a:t>2026/6/2</a:t>
+              <a:t>2026/6/4</a:t>
             </a:fld>
             <a:endParaRPr kumimoji="1" lang="ja-JP" altLang="en-US"/>
           </a:p>
@@ -3830,8 +3829,8 @@
         </p:nvSpPr>
         <p:spPr>
           <a:xfrm>
-            <a:off x="263898" y="227199"/>
-            <a:ext cx="4948518" cy="646331"/>
+            <a:off x="292472" y="170049"/>
+            <a:ext cx="5493965" cy="646331"/>
           </a:xfrm>
           <a:prstGeom prst="rect">
             <a:avLst/>
@@ -3851,42 +3850,12 @@
           </a:p>
         </p:txBody>
       </p:sp>
-    </p:spTree>
-    <p:extLst>
-      <p:ext uri="{BB962C8B-B14F-4D97-AF65-F5344CB8AC3E}">
-        <p14:creationId xmlns:p14="http://schemas.microsoft.com/office/powerpoint/2010/main" val="704128844"/>
-      </p:ext>
-    </p:extLst>
-  </p:cSld>
-  <p:clrMapOvr>
-    <a:masterClrMapping/>
-  </p:clrMapOvr>
-</p:sld>
-</file>
-
-<file path=ppt/slides/slide3.xml><?xml version="1.0" encoding="utf-8"?>
-<p:sld xmlns:a="http://schemas.openxmlformats.org/drawingml/2006/main" xmlns:r="http://schemas.openxmlformats.org/officeDocument/2006/relationships" xmlns:p="http://schemas.openxmlformats.org/presentationml/2006/main">
-  <p:cSld>
-    <p:spTree>
-      <p:nvGrpSpPr>
-        <p:cNvPr id="1" name=""/>
-        <p:cNvGrpSpPr/>
-        <p:nvPr/>
-      </p:nvGrpSpPr>
-      <p:grpSpPr>
-        <a:xfrm>
-          <a:off x="0" y="0"/>
-          <a:ext cx="0" cy="0"/>
-          <a:chOff x="0" y="0"/>
-          <a:chExt cx="0" cy="0"/>
-        </a:xfrm>
-      </p:grpSpPr>
-      <p:sp>
-        <p:nvSpPr>
-          <p:cNvPr id="4" name="テキスト ボックス 3">
-            <a:extLst>
-              <a:ext uri="{FF2B5EF4-FFF2-40B4-BE49-F238E27FC236}">
-                <a16:creationId xmlns:a16="http://schemas.microsoft.com/office/drawing/2014/main" id="{C512E33A-7FD5-4786-82F2-86E137F8EC4C}"/>
+      <p:sp>
+        <p:nvSpPr>
+          <p:cNvPr id="3" name="テキスト ボックス 2">
+            <a:extLst>
+              <a:ext uri="{FF2B5EF4-FFF2-40B4-BE49-F238E27FC236}">
+                <a16:creationId xmlns:a16="http://schemas.microsoft.com/office/drawing/2014/main" id="{1BC2E466-7AC9-48CE-A1BD-0E1B9F185211}"/>
               </a:ext>
             </a:extLst>
           </p:cNvPr>
@@ -3895,8 +3864,8 @@
         </p:nvSpPr>
         <p:spPr>
           <a:xfrm>
-            <a:off x="900112" y="414336"/>
-            <a:ext cx="3657600" cy="646331"/>
+            <a:off x="292472" y="1059267"/>
+            <a:ext cx="4808166" cy="646331"/>
           </a:xfrm>
           <a:prstGeom prst="rect">
             <a:avLst/>
@@ -3911,46 +3880,7 @@
           <a:p>
             <a:r>
               <a:rPr kumimoji="1" lang="ja-JP" altLang="en-US" dirty="0"/>
-              <a:t>マップ上にある様々なギミックを利用してクリアしていこう！！</a:t>
-            </a:r>
-          </a:p>
-        </p:txBody>
-      </p:sp>
-      <p:sp>
-        <p:nvSpPr>
-          <p:cNvPr id="5" name="テキスト ボックス 4">
-            <a:extLst>
-              <a:ext uri="{FF2B5EF4-FFF2-40B4-BE49-F238E27FC236}">
-                <a16:creationId xmlns:a16="http://schemas.microsoft.com/office/drawing/2014/main" id="{2BAC78CB-2D4C-448C-AE91-B6272EABBDA8}"/>
-              </a:ext>
-            </a:extLst>
-          </p:cNvPr>
-          <p:cNvSpPr txBox="1"/>
-          <p:nvPr/>
-        </p:nvSpPr>
-        <p:spPr>
-          <a:xfrm>
-            <a:off x="448235" y="5342069"/>
-            <a:ext cx="6651812" cy="369332"/>
-          </a:xfrm>
-          <a:prstGeom prst="rect">
-            <a:avLst/>
-          </a:prstGeom>
-          <a:noFill/>
-        </p:spPr>
-        <p:txBody>
-          <a:bodyPr wrap="square" rtlCol="0">
-            <a:spAutoFit/>
-          </a:bodyPr>
-          <a:lstStyle/>
-          <a:p>
-            <a:r>
-              <a:rPr kumimoji="1" lang="en-US" altLang="ja-JP" dirty="0"/>
-              <a:t>1.</a:t>
-            </a:r>
-            <a:r>
-              <a:rPr kumimoji="1" lang="ja-JP" altLang="en-US" dirty="0"/>
-              <a:t>ダッシュに必要なスタミナを回復</a:t>
+              <a:t>マップ上にある様々なギミックを利用して敵をかいくぐりゴールを目指そう！！</a:t>
             </a:r>
           </a:p>
         </p:txBody>
@@ -3958,7 +3888,7 @@
     </p:spTree>
     <p:extLst>
       <p:ext uri="{BB962C8B-B14F-4D97-AF65-F5344CB8AC3E}">
-        <p14:creationId xmlns:p14="http://schemas.microsoft.com/office/powerpoint/2010/main" val="752780063"/>
+        <p14:creationId xmlns:p14="http://schemas.microsoft.com/office/powerpoint/2010/main" val="704128844"/>
       </p:ext>
     </p:extLst>
   </p:cSld>
